--- a/docs/presentation/serverless-platform.pptx
+++ b/docs/presentation/serverless-platform.pptx
@@ -2866,7 +2866,7 @@
                 <a:ea typeface="Courier New" pitchFamily="34" charset="-122"/>
                 <a:cs typeface="Courier New" pitchFamily="34" charset="-120"/>
               </a:rPr>
-              <a:t>SERVERLESS ON CLOUDLET</a:t>
+              <a:t>CLOUDLET'S SERVERLESS</a:t>
             </a:r>
             <a:endParaRPr lang="en-US" sz="1200" dirty="0"/>
           </a:p>
@@ -3147,7 +3147,7 @@
                 <a:ea typeface="Courier New" pitchFamily="34" charset="-122"/>
                 <a:cs typeface="Courier New" pitchFamily="34" charset="-120"/>
               </a:rPr>
-              <a:t>CHAPTER 02 · THE API</a:t>
+              <a:t>THE API</a:t>
             </a:r>
             <a:endParaRPr lang="en-US" sz="1100" dirty="0"/>
           </a:p>
@@ -4872,7 +4872,7 @@
                 <a:ea typeface="Courier New" pitchFamily="34" charset="-122"/>
                 <a:cs typeface="Courier New" pitchFamily="34" charset="-120"/>
               </a:rPr>
-              <a:t>CHAPTER 02 · THE API</a:t>
+              <a:t>THE API</a:t>
             </a:r>
             <a:endParaRPr lang="en-US" sz="1100" dirty="0"/>
           </a:p>
@@ -6337,7 +6337,7 @@
                 <a:ea typeface="Courier New" pitchFamily="34" charset="-122"/>
                 <a:cs typeface="Courier New" pitchFamily="34" charset="-120"/>
               </a:rPr>
-              <a:t>CHAPTER 02 · THE API</a:t>
+              <a:t>THE API</a:t>
             </a:r>
             <a:endParaRPr lang="en-US" sz="1100" dirty="0"/>
           </a:p>
@@ -7743,7 +7743,7 @@
                 <a:ea typeface="Courier New" pitchFamily="34" charset="-122"/>
                 <a:cs typeface="Courier New" pitchFamily="34" charset="-120"/>
               </a:rPr>
-              <a:t>CHAPTER 02 · THE API</a:t>
+              <a:t>THE API</a:t>
             </a:r>
             <a:endParaRPr lang="en-US" sz="1100" dirty="0"/>
           </a:p>
@@ -9337,8 +9337,8 @@
         </p:nvSpPr>
         <p:spPr>
           <a:xfrm>
-            <a:off x="640080" y="914400"/>
-            <a:ext cx="5486400" cy="2377440"/>
+            <a:off x="640080" y="2194560"/>
+            <a:ext cx="10515600" cy="1463040"/>
           </a:xfrm>
           <a:prstGeom prst="rect">
             <a:avLst/>
@@ -9354,7 +9354,7 @@
               <a:buNone/>
             </a:pPr>
             <a:r>
-              <a:rPr lang="en-US" sz="15000" b="1" dirty="0">
+              <a:rPr lang="en-US" sz="6400" b="1" dirty="0">
                 <a:solidFill>
                   <a:srgbClr val="FFFFFF"/>
                 </a:solidFill>
@@ -9362,9 +9362,9 @@
                 <a:ea typeface="Century Schoolbook" pitchFamily="34" charset="-122"/>
                 <a:cs typeface="Century Schoolbook" pitchFamily="34" charset="-120"/>
               </a:rPr>
-              <a:t>03</a:t>
-            </a:r>
-            <a:endParaRPr lang="en-US" sz="15000" dirty="0"/>
+              <a:t>Functions &amp; builds</a:t>
+            </a:r>
+            <a:endParaRPr lang="en-US" sz="6400" dirty="0"/>
           </a:p>
         </p:txBody>
       </p:sp>
@@ -9376,8 +9376,8 @@
         </p:nvSpPr>
         <p:spPr>
           <a:xfrm>
-            <a:off x="640080" y="3383280"/>
-            <a:ext cx="10058400" cy="914400"/>
+            <a:off x="640080" y="3749040"/>
+            <a:ext cx="9144000" cy="548640"/>
           </a:xfrm>
           <a:prstGeom prst="rect">
             <a:avLst/>
@@ -9393,7 +9393,7 @@
               <a:buNone/>
             </a:pPr>
             <a:r>
-              <a:rPr lang="en-US" sz="4800" b="1" dirty="0">
+              <a:rPr lang="en-US" sz="2200" i="1" dirty="0">
                 <a:solidFill>
                   <a:srgbClr val="FFFFFF"/>
                 </a:solidFill>
@@ -9401,54 +9401,15 @@
                 <a:ea typeface="Century Schoolbook" pitchFamily="34" charset="-122"/>
                 <a:cs typeface="Century Schoolbook" pitchFamily="34" charset="-120"/>
               </a:rPr>
-              <a:t>Functions &amp; builds</a:t>
-            </a:r>
-            <a:endParaRPr lang="en-US" sz="4800" dirty="0"/>
+              <a:t>'Here is my repo' hides a build.</a:t>
+            </a:r>
+            <a:endParaRPr lang="en-US" sz="2200" dirty="0"/>
           </a:p>
         </p:txBody>
       </p:sp>
       <p:sp>
         <p:nvSpPr>
           <p:cNvPr id="4" name="Text 2"/>
-          <p:cNvSpPr txBox="1"/>
-          <p:nvPr/>
-        </p:nvSpPr>
-        <p:spPr>
-          <a:xfrm>
-            <a:off x="640080" y="4343400"/>
-            <a:ext cx="9144000" cy="548640"/>
-          </a:xfrm>
-          <a:prstGeom prst="rect">
-            <a:avLst/>
-          </a:prstGeom>
-          <a:noFill/>
-          <a:ln/>
-        </p:spPr>
-        <p:txBody>
-          <a:bodyPr wrap="square" lIns="0" tIns="0" rIns="0" bIns="0" rtlCol="0" anchor="ctr"/>
-          <a:lstStyle/>
-          <a:p>
-            <a:pPr indent="0" marL="0">
-              <a:buNone/>
-            </a:pPr>
-            <a:r>
-              <a:rPr lang="en-US" sz="2200" i="1" dirty="0">
-                <a:solidFill>
-                  <a:srgbClr val="FFFFFF"/>
-                </a:solidFill>
-                <a:latin typeface="Century Schoolbook" pitchFamily="34" charset="0"/>
-                <a:ea typeface="Century Schoolbook" pitchFamily="34" charset="-122"/>
-                <a:cs typeface="Century Schoolbook" pitchFamily="34" charset="-120"/>
-              </a:rPr>
-              <a:t>'Here is my repo' hides a build.</a:t>
-            </a:r>
-            <a:endParaRPr lang="en-US" sz="2200" dirty="0"/>
-          </a:p>
-        </p:txBody>
-      </p:sp>
-      <p:sp>
-        <p:nvSpPr>
-          <p:cNvPr id="5" name="Text 3"/>
           <p:cNvSpPr txBox="1"/>
           <p:nvPr/>
         </p:nvSpPr>
@@ -9553,7 +9514,7 @@
                 <a:ea typeface="Courier New" pitchFamily="34" charset="-122"/>
                 <a:cs typeface="Courier New" pitchFamily="34" charset="-120"/>
               </a:rPr>
-              <a:t>CHAPTER 03 · FUNCTIONS &amp; BUILDS</a:t>
+              <a:t>FUNCTIONS &amp; BUILDS</a:t>
             </a:r>
             <a:endParaRPr lang="en-US" sz="1100" dirty="0"/>
           </a:p>
@@ -11101,7 +11062,7 @@
                 <a:ea typeface="Courier New" pitchFamily="34" charset="-122"/>
                 <a:cs typeface="Courier New" pitchFamily="34" charset="-120"/>
               </a:rPr>
-              <a:t>CHAPTER 03 · FUNCTIONS &amp; BUILDS</a:t>
+              <a:t>FUNCTIONS &amp; BUILDS</a:t>
             </a:r>
             <a:endParaRPr lang="en-US" sz="1100" dirty="0"/>
           </a:p>
@@ -12803,7 +12764,7 @@
                 <a:ea typeface="Courier New" pitchFamily="34" charset="-122"/>
                 <a:cs typeface="Courier New" pitchFamily="34" charset="-120"/>
               </a:rPr>
-              <a:t>CHAPTER 03 · FUNCTIONS &amp; BUILDS</a:t>
+              <a:t>FUNCTIONS &amp; BUILDS</a:t>
             </a:r>
             <a:endParaRPr lang="en-US" sz="1100" dirty="0"/>
           </a:p>
@@ -14765,7 +14726,7 @@
                 <a:ea typeface="Courier New" pitchFamily="34" charset="-122"/>
                 <a:cs typeface="Courier New" pitchFamily="34" charset="-120"/>
               </a:rPr>
-              <a:t>CHAPTER 03 · FUNCTIONS &amp; BUILDS</a:t>
+              <a:t>FUNCTIONS &amp; BUILDS</a:t>
             </a:r>
             <a:endParaRPr lang="en-US" sz="1100" dirty="0"/>
           </a:p>
@@ -16205,8 +16166,8 @@
         </p:nvSpPr>
         <p:spPr>
           <a:xfrm>
-            <a:off x="640080" y="914400"/>
-            <a:ext cx="5486400" cy="2377440"/>
+            <a:off x="640080" y="2194560"/>
+            <a:ext cx="10515600" cy="1463040"/>
           </a:xfrm>
           <a:prstGeom prst="rect">
             <a:avLst/>
@@ -16222,7 +16183,7 @@
               <a:buNone/>
             </a:pPr>
             <a:r>
-              <a:rPr lang="en-US" sz="15000" b="1" dirty="0">
+              <a:rPr lang="en-US" sz="6400" b="1" dirty="0">
                 <a:solidFill>
                   <a:srgbClr val="FFFFFF"/>
                 </a:solidFill>
@@ -16230,9 +16191,9 @@
                 <a:ea typeface="Century Schoolbook" pitchFamily="34" charset="-122"/>
                 <a:cs typeface="Century Schoolbook" pitchFamily="34" charset="-120"/>
               </a:rPr>
-              <a:t>04</a:t>
-            </a:r>
-            <a:endParaRPr lang="en-US" sz="15000" dirty="0"/>
+              <a:t>Portal &amp; the future</a:t>
+            </a:r>
+            <a:endParaRPr lang="en-US" sz="6400" dirty="0"/>
           </a:p>
         </p:txBody>
       </p:sp>
@@ -16244,8 +16205,8 @@
         </p:nvSpPr>
         <p:spPr>
           <a:xfrm>
-            <a:off x="640080" y="3383280"/>
-            <a:ext cx="10058400" cy="914400"/>
+            <a:off x="640080" y="3749040"/>
+            <a:ext cx="9144000" cy="548640"/>
           </a:xfrm>
           <a:prstGeom prst="rect">
             <a:avLst/>
@@ -16261,7 +16222,7 @@
               <a:buNone/>
             </a:pPr>
             <a:r>
-              <a:rPr lang="en-US" sz="4800" b="1" dirty="0">
+              <a:rPr lang="en-US" sz="2200" i="1" dirty="0">
                 <a:solidFill>
                   <a:srgbClr val="FFFFFF"/>
                 </a:solidFill>
@@ -16269,54 +16230,15 @@
                 <a:ea typeface="Century Schoolbook" pitchFamily="34" charset="-122"/>
                 <a:cs typeface="Century Schoolbook" pitchFamily="34" charset="-120"/>
               </a:rPr>
-              <a:t>Portal &amp; the future</a:t>
-            </a:r>
-            <a:endParaRPr lang="en-US" sz="4800" dirty="0"/>
+              <a:t>A console, and a library for the next API.</a:t>
+            </a:r>
+            <a:endParaRPr lang="en-US" sz="2200" dirty="0"/>
           </a:p>
         </p:txBody>
       </p:sp>
       <p:sp>
         <p:nvSpPr>
           <p:cNvPr id="4" name="Text 2"/>
-          <p:cNvSpPr txBox="1"/>
-          <p:nvPr/>
-        </p:nvSpPr>
-        <p:spPr>
-          <a:xfrm>
-            <a:off x="640080" y="4343400"/>
-            <a:ext cx="9144000" cy="548640"/>
-          </a:xfrm>
-          <a:prstGeom prst="rect">
-            <a:avLst/>
-          </a:prstGeom>
-          <a:noFill/>
-          <a:ln/>
-        </p:spPr>
-        <p:txBody>
-          <a:bodyPr wrap="square" lIns="0" tIns="0" rIns="0" bIns="0" rtlCol="0" anchor="ctr"/>
-          <a:lstStyle/>
-          <a:p>
-            <a:pPr indent="0" marL="0">
-              <a:buNone/>
-            </a:pPr>
-            <a:r>
-              <a:rPr lang="en-US" sz="2200" i="1" dirty="0">
-                <a:solidFill>
-                  <a:srgbClr val="FFFFFF"/>
-                </a:solidFill>
-                <a:latin typeface="Century Schoolbook" pitchFamily="34" charset="0"/>
-                <a:ea typeface="Century Schoolbook" pitchFamily="34" charset="-122"/>
-                <a:cs typeface="Century Schoolbook" pitchFamily="34" charset="-120"/>
-              </a:rPr>
-              <a:t>A console, and a library for the next API.</a:t>
-            </a:r>
-            <a:endParaRPr lang="en-US" sz="2200" dirty="0"/>
-          </a:p>
-        </p:txBody>
-      </p:sp>
-      <p:sp>
-        <p:nvSpPr>
-          <p:cNvPr id="5" name="Text 3"/>
           <p:cNvSpPr txBox="1"/>
           <p:nvPr/>
         </p:nvSpPr>
@@ -16421,7 +16343,7 @@
                 <a:ea typeface="Courier New" pitchFamily="34" charset="-122"/>
                 <a:cs typeface="Courier New" pitchFamily="34" charset="-120"/>
               </a:rPr>
-              <a:t>AGENDA</a:t>
+              <a:t>TODAY</a:t>
             </a:r>
             <a:endParaRPr lang="en-US" sz="1100" dirty="0"/>
           </a:p>
@@ -16460,7 +16382,7 @@
                 <a:ea typeface="Century Schoolbook" pitchFamily="34" charset="-122"/>
                 <a:cs typeface="Century Schoolbook" pitchFamily="34" charset="-120"/>
               </a:rPr>
-              <a:t>Four chapters</a:t>
+              <a:t>What we'll talk about</a:t>
             </a:r>
             <a:endParaRPr lang="en-US" sz="3800" dirty="0"/>
           </a:p>
@@ -16524,7 +16446,7 @@
                 <a:ea typeface="Calibri" pitchFamily="34" charset="-122"/>
                 <a:cs typeface="Calibri" pitchFamily="34" charset="-120"/>
               </a:rPr>
-              <a:t>01  Foundations: serverless, Knative, the Operator</a:t>
+              <a:t>Serverless, Knative and the Operator</a:t>
             </a:r>
             <a:endParaRPr lang="en-US" sz="1900" dirty="0"/>
           </a:p>
@@ -16588,7 +16510,7 @@
                 <a:ea typeface="Calibri" pitchFamily="34" charset="-122"/>
                 <a:cs typeface="Calibri" pitchFamily="34" charset="-120"/>
               </a:rPr>
-              <a:t>02  The API: contract, mTLS, two regions</a:t>
+              <a:t>The API: contract, mTLS, two regions</a:t>
             </a:r>
             <a:endParaRPr lang="en-US" sz="1900" dirty="0"/>
           </a:p>
@@ -16652,7 +16574,7 @@
                 <a:ea typeface="Calibri" pitchFamily="34" charset="-122"/>
                 <a:cs typeface="Calibri" pitchFamily="34" charset="-120"/>
               </a:rPr>
-              <a:t>03  Functions: buildpacks, kpack, build controller</a:t>
+              <a:t>Functions: buildpacks, kpack, build controller</a:t>
             </a:r>
             <a:endParaRPr lang="en-US" sz="1900" dirty="0"/>
           </a:p>
@@ -16716,7 +16638,7 @@
                 <a:ea typeface="Calibri" pitchFamily="34" charset="-122"/>
                 <a:cs typeface="Calibri" pitchFamily="34" charset="-120"/>
               </a:rPr>
-              <a:t>04  Portal and cloudlet-apis: what comes next</a:t>
+              <a:t>The portal and cloudlet-apis</a:t>
             </a:r>
             <a:endParaRPr lang="en-US" sz="1900" dirty="0"/>
           </a:p>
@@ -16724,7 +16646,71 @@
       </p:sp>
       <p:sp>
         <p:nvSpPr>
-          <p:cNvPr id="13" name="Text 10"/>
+          <p:cNvPr id="13" name="step:5"/>
+          <p:cNvSpPr/>
+          <p:nvPr/>
+        </p:nvSpPr>
+        <p:spPr>
+          <a:xfrm>
+            <a:off x="640080" y="5001768"/>
+            <a:ext cx="118872" cy="118872"/>
+          </a:xfrm>
+          <a:prstGeom prst="rect">
+            <a:avLst/>
+          </a:prstGeom>
+          <a:solidFill>
+            <a:srgbClr val="E4572E"/>
+          </a:solidFill>
+          <a:ln w="12700">
+            <a:solidFill>
+              <a:srgbClr val="E4572E"/>
+            </a:solidFill>
+            <a:prstDash val="solid"/>
+          </a:ln>
+        </p:spPr>
+      </p:sp>
+      <p:sp>
+        <p:nvSpPr>
+          <p:cNvPr id="14" name="step:5"/>
+          <p:cNvSpPr txBox="1"/>
+          <p:nvPr/>
+        </p:nvSpPr>
+        <p:spPr>
+          <a:xfrm>
+            <a:off x="960120" y="4736592"/>
+            <a:ext cx="4983480" cy="658368"/>
+          </a:xfrm>
+          <a:prstGeom prst="rect">
+            <a:avLst/>
+          </a:prstGeom>
+          <a:noFill/>
+          <a:ln/>
+        </p:spPr>
+        <p:txBody>
+          <a:bodyPr wrap="square" lIns="0" tIns="0" rIns="0" bIns="0" rtlCol="0" anchor="ctr"/>
+          <a:lstStyle/>
+          <a:p>
+            <a:pPr indent="0" marL="0">
+              <a:buNone/>
+            </a:pPr>
+            <a:r>
+              <a:rPr lang="en-US" sz="1900" dirty="0">
+                <a:solidFill>
+                  <a:srgbClr val="1B1F2A"/>
+                </a:solidFill>
+                <a:latin typeface="Calibri" pitchFamily="34" charset="0"/>
+                <a:ea typeface="Calibri" pitchFamily="34" charset="-122"/>
+                <a:cs typeface="Calibri" pitchFamily="34" charset="-120"/>
+              </a:rPr>
+              <a:t>Where we go next</a:t>
+            </a:r>
+            <a:endParaRPr lang="en-US" sz="1900" dirty="0"/>
+          </a:p>
+        </p:txBody>
+      </p:sp>
+      <p:sp>
+        <p:nvSpPr>
+          <p:cNvPr id="15" name="Text 12"/>
           <p:cNvSpPr txBox="1"/>
           <p:nvPr/>
         </p:nvSpPr>
@@ -16755,7 +16741,7 @@
                 <a:ea typeface="Century Schoolbook" pitchFamily="34" charset="-122"/>
                 <a:cs typeface="Century Schoolbook" pitchFamily="34" charset="-120"/>
               </a:rPr>
-              <a:t>01 → 04</a:t>
+              <a:t>23</a:t>
             </a:r>
             <a:endParaRPr lang="en-US" sz="5400" dirty="0"/>
           </a:p>
@@ -16763,7 +16749,7 @@
       </p:sp>
       <p:sp>
         <p:nvSpPr>
-          <p:cNvPr id="14" name="Text 11"/>
+          <p:cNvPr id="16" name="Text 13"/>
           <p:cNvSpPr txBox="1"/>
           <p:nvPr/>
         </p:nvSpPr>
@@ -16794,7 +16780,7 @@
                 <a:ea typeface="Courier New" pitchFamily="34" charset="-122"/>
                 <a:cs typeface="Courier New" pitchFamily="34" charset="-120"/>
               </a:rPr>
-              <a:t>fourteen questions, one platform</a:t>
+              <a:t>slides · four topics · one platform</a:t>
             </a:r>
             <a:endParaRPr lang="en-US" sz="1100" dirty="0"/>
           </a:p>
@@ -16802,7 +16788,7 @@
       </p:sp>
       <p:sp>
         <p:nvSpPr>
-          <p:cNvPr id="15" name="Text 12"/>
+          <p:cNvPr id="17" name="Text 14"/>
           <p:cNvSpPr txBox="1"/>
           <p:nvPr/>
         </p:nvSpPr>
@@ -17195,6 +17181,94 @@
                                         <p:cTn id="32" dur="400"/>
                                         <p:tgtEl>
                                           <p:spTgt spid="12"/>
+                                        </p:tgtEl>
+                                      </p:cBhvr>
+                                    </p:animEffect>
+                                  </p:childTnLst>
+                                </p:cTn>
+                              </p:par>
+                            </p:childTnLst>
+                          </p:cTn>
+                        </p:par>
+                      </p:childTnLst>
+                    </p:cTn>
+                  </p:par>
+                  <p:par>
+                    <p:cTn id="41" fill="hold">
+                      <p:stCondLst>
+                        <p:cond delay="indefinite"/>
+                      </p:stCondLst>
+                      <p:childTnLst>
+                        <p:par>
+                          <p:cTn id="42" fill="hold">
+                            <p:stCondLst>
+                              <p:cond delay="0"/>
+                            </p:stCondLst>
+                            <p:childTnLst>
+                              <p:par>
+                                <p:cTn id="35" presetID="10" presetClass="entr" presetSubtype="0" fill="hold" grpId="0" nodeType="clickEffect">
+                                  <p:stCondLst>
+                                    <p:cond delay="0"/>
+                                  </p:stCondLst>
+                                  <p:childTnLst>
+                                    <p:set>
+                                      <p:cBhvr>
+                                        <p:cTn id="36" dur="1" fill="hold">
+                                          <p:stCondLst>
+                                            <p:cond delay="0"/>
+                                          </p:stCondLst>
+                                        </p:cTn>
+                                        <p:tgtEl>
+                                          <p:spTgt spid="13"/>
+                                        </p:tgtEl>
+                                        <p:attrNameLst>
+                                          <p:attrName>style.visibility</p:attrName>
+                                        </p:attrNameLst>
+                                      </p:cBhvr>
+                                      <p:to>
+                                        <p:strVal val="visible"/>
+                                      </p:to>
+                                    </p:set>
+                                    <p:animEffect transition="in" filter="fade">
+                                      <p:cBhvr>
+                                        <p:cTn id="37" dur="400"/>
+                                        <p:tgtEl>
+                                          <p:spTgt spid="13"/>
+                                        </p:tgtEl>
+                                      </p:cBhvr>
+                                    </p:animEffect>
+                                  </p:childTnLst>
+                                </p:cTn>
+                              </p:par>
+                              <p:par>
+                                <p:cTn id="38" presetID="10" presetClass="entr" presetSubtype="0" fill="hold" grpId="0" nodeType="withEffect">
+                                  <p:stCondLst>
+                                    <p:cond delay="0"/>
+                                  </p:stCondLst>
+                                  <p:childTnLst>
+                                    <p:set>
+                                      <p:cBhvr>
+                                        <p:cTn id="39" dur="1" fill="hold">
+                                          <p:stCondLst>
+                                            <p:cond delay="0"/>
+                                          </p:stCondLst>
+                                        </p:cTn>
+                                        <p:tgtEl>
+                                          <p:spTgt spid="14"/>
+                                        </p:tgtEl>
+                                        <p:attrNameLst>
+                                          <p:attrName>style.visibility</p:attrName>
+                                        </p:attrNameLst>
+                                      </p:cBhvr>
+                                      <p:to>
+                                        <p:strVal val="visible"/>
+                                      </p:to>
+                                    </p:set>
+                                    <p:animEffect transition="in" filter="fade">
+                                      <p:cBhvr>
+                                        <p:cTn id="40" dur="400"/>
+                                        <p:tgtEl>
+                                          <p:spTgt spid="14"/>
                                         </p:tgtEl>
                                       </p:cBhvr>
                                     </p:animEffect>
@@ -17237,6 +17311,8 @@
       <p:bldP spid="10" grpId="0"/>
       <p:bldP spid="11" grpId="0"/>
       <p:bldP spid="12" grpId="0"/>
+      <p:bldP spid="13" grpId="0"/>
+      <p:bldP spid="14" grpId="0"/>
     </p:bldLst>
   </p:timing>
 </p:sld>
@@ -17299,7 +17375,7 @@
                 <a:ea typeface="Courier New" pitchFamily="34" charset="-122"/>
                 <a:cs typeface="Courier New" pitchFamily="34" charset="-120"/>
               </a:rPr>
-              <a:t>CHAPTER 04 · PORTAL &amp; THE FUTURE</a:t>
+              <a:t>PORTAL &amp; THE FUTURE</a:t>
             </a:r>
             <a:endParaRPr lang="en-US" sz="1100" dirty="0"/>
           </a:p>
@@ -18942,7 +19018,7 @@
                 <a:ea typeface="Courier New" pitchFamily="34" charset="-122"/>
                 <a:cs typeface="Courier New" pitchFamily="34" charset="-120"/>
               </a:rPr>
-              <a:t>CHAPTER 04 · PORTAL &amp; THE FUTURE</a:t>
+              <a:t>PORTAL &amp; THE FUTURE</a:t>
             </a:r>
             <a:endParaRPr lang="en-US" sz="1100" dirty="0"/>
           </a:p>
@@ -20612,7 +20688,7 @@
                 <a:ea typeface="Courier New" pitchFamily="34" charset="-122"/>
                 <a:cs typeface="Courier New" pitchFamily="34" charset="-120"/>
               </a:rPr>
-              <a:t>CHAPTER 04 · PORTAL &amp; THE FUTURE</a:t>
+              <a:t>PORTAL &amp; THE FUTURE</a:t>
             </a:r>
             <a:endParaRPr lang="en-US" sz="1100" dirty="0"/>
           </a:p>
@@ -23782,7 +23858,7 @@
                 <a:ea typeface="Courier New" pitchFamily="34" charset="-122"/>
                 <a:cs typeface="Courier New" pitchFamily="34" charset="-120"/>
               </a:rPr>
-              <a:t>CHAPTER 01 · FOUNDATIONS</a:t>
+              <a:t>FOUNDATIONS</a:t>
             </a:r>
             <a:endParaRPr lang="en-US" sz="1100" dirty="0"/>
           </a:p>
@@ -24814,7 +24890,7 @@
                 <a:ea typeface="Courier New" pitchFamily="34" charset="-122"/>
                 <a:cs typeface="Courier New" pitchFamily="34" charset="-120"/>
               </a:rPr>
-              <a:t>CHAPTER 01 · FOUNDATIONS</a:t>
+              <a:t>FOUNDATIONS</a:t>
             </a:r>
             <a:endParaRPr lang="en-US" sz="1100" dirty="0"/>
           </a:p>
@@ -26433,7 +26509,7 @@
                 <a:ea typeface="Courier New" pitchFamily="34" charset="-122"/>
                 <a:cs typeface="Courier New" pitchFamily="34" charset="-120"/>
               </a:rPr>
-              <a:t>CHAPTER 01 · FOUNDATIONS</a:t>
+              <a:t>FOUNDATIONS</a:t>
             </a:r>
             <a:endParaRPr lang="en-US" sz="1100" dirty="0"/>
           </a:p>
@@ -27912,7 +27988,7 @@
                 <a:ea typeface="Courier New" pitchFamily="34" charset="-122"/>
                 <a:cs typeface="Courier New" pitchFamily="34" charset="-120"/>
               </a:rPr>
-              <a:t>CHAPTER 01 · FOUNDATIONS</a:t>
+              <a:t>FOUNDATIONS</a:t>
             </a:r>
             <a:endParaRPr lang="en-US" sz="1100" dirty="0"/>
           </a:p>
@@ -29313,8 +29389,8 @@
         </p:nvSpPr>
         <p:spPr>
           <a:xfrm>
-            <a:off x="640080" y="914400"/>
-            <a:ext cx="5486400" cy="2377440"/>
+            <a:off x="640080" y="2194560"/>
+            <a:ext cx="10515600" cy="1463040"/>
           </a:xfrm>
           <a:prstGeom prst="rect">
             <a:avLst/>
@@ -29330,7 +29406,7 @@
               <a:buNone/>
             </a:pPr>
             <a:r>
-              <a:rPr lang="en-US" sz="15000" b="1" dirty="0">
+              <a:rPr lang="en-US" sz="6400" b="1" dirty="0">
                 <a:solidFill>
                   <a:srgbClr val="FFFFFF"/>
                 </a:solidFill>
@@ -29338,9 +29414,9 @@
                 <a:ea typeface="Century Schoolbook" pitchFamily="34" charset="-122"/>
                 <a:cs typeface="Century Schoolbook" pitchFamily="34" charset="-120"/>
               </a:rPr>
-              <a:t>02</a:t>
-            </a:r>
-            <a:endParaRPr lang="en-US" sz="15000" dirty="0"/>
+              <a:t>The API</a:t>
+            </a:r>
+            <a:endParaRPr lang="en-US" sz="6400" dirty="0"/>
           </a:p>
         </p:txBody>
       </p:sp>
@@ -29352,8 +29428,8 @@
         </p:nvSpPr>
         <p:spPr>
           <a:xfrm>
-            <a:off x="640080" y="3383280"/>
-            <a:ext cx="10058400" cy="914400"/>
+            <a:off x="640080" y="3749040"/>
+            <a:ext cx="9144000" cy="548640"/>
           </a:xfrm>
           <a:prstGeom prst="rect">
             <a:avLst/>
@@ -29369,7 +29445,7 @@
               <a:buNone/>
             </a:pPr>
             <a:r>
-              <a:rPr lang="en-US" sz="4800" b="1" dirty="0">
+              <a:rPr lang="en-US" sz="2200" i="1" dirty="0">
                 <a:solidFill>
                   <a:srgbClr val="FFFFFF"/>
                 </a:solidFill>
@@ -29377,54 +29453,15 @@
                 <a:ea typeface="Century Schoolbook" pitchFamily="34" charset="-122"/>
                 <a:cs typeface="Century Schoolbook" pitchFamily="34" charset="-120"/>
               </a:rPr>
-              <a:t>The API</a:t>
-            </a:r>
-            <a:endParaRPr lang="en-US" sz="4800" dirty="0"/>
+              <a:t>One HTTP call, a workload on every cluster.</a:t>
+            </a:r>
+            <a:endParaRPr lang="en-US" sz="2200" dirty="0"/>
           </a:p>
         </p:txBody>
       </p:sp>
       <p:sp>
         <p:nvSpPr>
           <p:cNvPr id="4" name="Text 2"/>
-          <p:cNvSpPr txBox="1"/>
-          <p:nvPr/>
-        </p:nvSpPr>
-        <p:spPr>
-          <a:xfrm>
-            <a:off x="640080" y="4343400"/>
-            <a:ext cx="9144000" cy="548640"/>
-          </a:xfrm>
-          <a:prstGeom prst="rect">
-            <a:avLst/>
-          </a:prstGeom>
-          <a:noFill/>
-          <a:ln/>
-        </p:spPr>
-        <p:txBody>
-          <a:bodyPr wrap="square" lIns="0" tIns="0" rIns="0" bIns="0" rtlCol="0" anchor="ctr"/>
-          <a:lstStyle/>
-          <a:p>
-            <a:pPr indent="0" marL="0">
-              <a:buNone/>
-            </a:pPr>
-            <a:r>
-              <a:rPr lang="en-US" sz="2200" i="1" dirty="0">
-                <a:solidFill>
-                  <a:srgbClr val="FFFFFF"/>
-                </a:solidFill>
-                <a:latin typeface="Century Schoolbook" pitchFamily="34" charset="0"/>
-                <a:ea typeface="Century Schoolbook" pitchFamily="34" charset="-122"/>
-                <a:cs typeface="Century Schoolbook" pitchFamily="34" charset="-120"/>
-              </a:rPr>
-              <a:t>One HTTP call, a workload on every cluster.</a:t>
-            </a:r>
-            <a:endParaRPr lang="en-US" sz="2200" dirty="0"/>
-          </a:p>
-        </p:txBody>
-      </p:sp>
-      <p:sp>
-        <p:nvSpPr>
-          <p:cNvPr id="5" name="Text 3"/>
           <p:cNvSpPr txBox="1"/>
           <p:nvPr/>
         </p:nvSpPr>
@@ -29529,7 +29566,7 @@
                 <a:ea typeface="Courier New" pitchFamily="34" charset="-122"/>
                 <a:cs typeface="Courier New" pitchFamily="34" charset="-120"/>
               </a:rPr>
-              <a:t>CHAPTER 02 · THE API</a:t>
+              <a:t>THE API</a:t>
             </a:r>
             <a:endParaRPr lang="en-US" sz="1100" dirty="0"/>
           </a:p>
@@ -30795,7 +30832,7 @@
                 <a:ea typeface="Courier New" pitchFamily="34" charset="-122"/>
                 <a:cs typeface="Courier New" pitchFamily="34" charset="-120"/>
               </a:rPr>
-              <a:t>CHAPTER 02 · THE API</a:t>
+              <a:t>THE API</a:t>
             </a:r>
             <a:endParaRPr lang="en-US" sz="1100" dirty="0"/>
           </a:p>

--- a/docs/presentation/serverless-platform.pptx
+++ b/docs/presentation/serverless-platform.pptx
@@ -2881,7 +2881,7 @@
         <p:spPr>
           <a:xfrm>
             <a:off x="640080" y="2194560"/>
-            <a:ext cx="8686800" cy="1828800"/>
+            <a:ext cx="7680960" cy="1828800"/>
           </a:xfrm>
           <a:prstGeom prst="rect">
             <a:avLst/>
